--- a/videos/deep-learning/001_transformers_part1/recreated_pptx/slide_038_recreated.pptx
+++ b/videos/deep-learning/001_transformers_part1/recreated_pptx/slide_038_recreated.pptx
@@ -8950,8 +8950,8 @@
         </p:nvSpPr>
         <p:spPr>
           <a:xfrm rot="5400000">
-            <a:off x="4724400" y="2247900"/>
-            <a:ext cx="609600" cy="2895600"/>
+            <a:off x="4206875" y="3702050"/>
+            <a:ext cx="1651000" cy="203200"/>
           </a:xfrm>
           <a:prstGeom prst="rect">
             <a:avLst/>
@@ -8967,7 +8967,7 @@
               <a:buNone/>
             </a:pPr>
             <a:r>
-              <a:rPr lang="en-US" sz="1100" b="1" dirty="0">
+              <a:rPr lang="en-US" sz="1600" b="1" spc="150" kern="0" dirty="0">
                 <a:solidFill>
                   <a:srgbClr val="E8890C"/>
                 </a:solidFill>
@@ -8977,7 +8977,7 @@
               </a:rPr>
               <a:t>Scaling by √d</a:t>
             </a:r>
-            <a:endParaRPr lang="en-US" sz="1100" dirty="0"/>
+            <a:endParaRPr lang="en-US" sz="1600" dirty="0"/>
           </a:p>
         </p:txBody>
       </p:sp>
